--- a/dist/초4/수학/자료와규칙/초4_수학_자료와규칙_02_꺾은선그래프.pptx
+++ b/dist/초4/수학/자료와규칙/초4_수학_자료와규칙_02_꺾은선그래프.pptx
@@ -121,13 +121,13 @@
   <p:extLst>
     <p:ext uri="{521415D9-36F7-43E2-AB2F-B90AF26B5E84}">
       <p14:sectionLst xmlns:p14="http://schemas.microsoft.com/office/powerpoint/2010/main">
-        <p14:section name="도입" id="{5381d3df-050a-54e4-6006-a8654561817b}">
+        <p14:section name="도입" id="{902b54ab-caf1-4c78-f092-adddd8e82d0a}">
           <p14:sldIdLst>
             <p14:sldId id="256"/>
             <p14:sldId id="257"/>
           </p14:sldIdLst>
         </p14:section>
-        <p14:section name="개념" id="{5a8eb0a6-e45f-3d58-9a1c-c7056ec99bba}">
+        <p14:section name="개념" id="{c71e12e0-7759-f65d-9b77-b186177900d8}">
           <p14:sldIdLst>
             <p14:sldId id="258"/>
             <p14:sldId id="259"/>
@@ -136,32 +136,32 @@
             <p14:sldId id="264"/>
           </p14:sldIdLst>
         </p14:section>
-        <p14:section name="연습" id="{d0431c2a-c335-84da-1764-e2d07c64d0ae}">
+        <p14:section name="연습" id="{bbd75134-8c07-30a2-49de-27a26d5daded}">
           <p14:sldIdLst>
             <p14:sldId id="261"/>
             <p14:sldId id="262"/>
             <p14:sldId id="265"/>
           </p14:sldIdLst>
         </p14:section>
-        <p14:section name="개념" id="{5429975e-9175-0c51-da76-d4eb6fc36cb6}">
+        <p14:section name="개념" id="{289f3c9a-2790-71ac-de4a-b8d0f9bfb9b0}">
           <p14:sldIdLst/>
         </p14:section>
-        <p14:section name="연습" id="{a7b725e4-4b9f-fd56-0f0a-33808bcc025e}">
+        <p14:section name="연습" id="{3c149332-9075-fd46-1613-4229ab061f4a}">
           <p14:sldIdLst/>
         </p14:section>
-        <p14:section name="확인" id="{678bb444-4cd8-a58f-82bc-9fe3347e2373}">
+        <p14:section name="확인" id="{75b1c36f-5fda-6b6d-1eca-ffad387e5529}">
           <p14:sldIdLst>
             <p14:sldId id="266"/>
             <p14:sldId id="267"/>
             <p14:sldId id="268"/>
           </p14:sldIdLst>
         </p14:section>
-        <p14:section name="정리" id="{94c3b5d8-d32d-2ce1-26c1-b1b5ab3932d7}">
+        <p14:section name="정리" id="{e66bb140-8484-a5e1-d0fe-c1273942791e}">
           <p14:sldIdLst>
             <p14:sldId id="269"/>
           </p14:sldIdLst>
         </p14:section>
-        <p14:section name="보충" id="{36960a66-5536-117e-a4a2-acf96c7afd0d}">
+        <p14:section name="보충" id="{b0a3ceef-fd94-a860-b81d-367ab71be1a7}">
           <p14:sldIdLst>
             <p14:sldId id="270"/>
           </p14:sldIdLst>
